--- a/presentations/Bussiness Presentation.pptx
+++ b/presentations/Bussiness Presentation.pptx
@@ -22232,28 +22232,6 @@
           </a:prstGeom>
         </p:spPr>
       </p:pic>
-      <p:pic>
-        <p:nvPicPr>
-          <p:cNvPr id="3" name="object 3"/>
-          <p:cNvPicPr/>
-          <p:nvPr/>
-        </p:nvPicPr>
-        <p:blipFill>
-          <a:blip r:embed="rId3" cstate="print"/>
-          <a:stretch>
-            <a:fillRect/>
-          </a:stretch>
-        </p:blipFill>
-        <p:spPr>
-          <a:xfrm>
-            <a:off x="10147300" y="3860800"/>
-            <a:ext cx="6324600" cy="3225800"/>
-          </a:xfrm>
-          <a:prstGeom prst="rect">
-            <a:avLst/>
-          </a:prstGeom>
-        </p:spPr>
-      </p:pic>
       <p:sp>
         <p:nvSpPr>
           <p:cNvPr id="4" name="object 4"/>
@@ -23049,288 +23027,6 @@
       </p:sp>
       <p:sp>
         <p:nvSpPr>
-          <p:cNvPr id="7" name="object 7"/>
-          <p:cNvSpPr txBox="1"/>
-          <p:nvPr/>
-        </p:nvSpPr>
-        <p:spPr>
-          <a:xfrm>
-            <a:off x="9835201" y="5927725"/>
-            <a:ext cx="135255" cy="311150"/>
-          </a:xfrm>
-          <a:prstGeom prst="rect">
-            <a:avLst/>
-          </a:prstGeom>
-        </p:spPr>
-        <p:txBody>
-          <a:bodyPr vert="horz" wrap="square" lIns="0" tIns="15875" rIns="0" bIns="0" rtlCol="0">
-            <a:spAutoFit/>
-          </a:bodyPr>
-          <a:lstStyle/>
-          <a:p>
-            <a:pPr marL="12700">
-              <a:lnSpc>
-                <a:spcPct val="100000"/>
-              </a:lnSpc>
-              <a:spcBef>
-                <a:spcPts val="125"/>
-              </a:spcBef>
-            </a:pPr>
-            <a:r>
-              <a:rPr sz="1850" spc="-50" dirty="0">
-                <a:latin typeface="Calibri"/>
-                <a:cs typeface="Calibri"/>
-              </a:rPr>
-              <a:t>E</a:t>
-            </a:r>
-            <a:endParaRPr sz="1850">
-              <a:latin typeface="Calibri"/>
-              <a:cs typeface="Calibri"/>
-            </a:endParaRPr>
-          </a:p>
-        </p:txBody>
-      </p:sp>
-      <p:sp>
-        <p:nvSpPr>
-          <p:cNvPr id="8" name="object 8"/>
-          <p:cNvSpPr txBox="1"/>
-          <p:nvPr/>
-        </p:nvSpPr>
-        <p:spPr>
-          <a:xfrm>
-            <a:off x="10765372" y="3012369"/>
-            <a:ext cx="5057140" cy="1165225"/>
-          </a:xfrm>
-          <a:prstGeom prst="rect">
-            <a:avLst/>
-          </a:prstGeom>
-        </p:spPr>
-        <p:txBody>
-          <a:bodyPr vert="horz" wrap="square" lIns="0" tIns="226060" rIns="0" bIns="0" rtlCol="0">
-            <a:spAutoFit/>
-          </a:bodyPr>
-          <a:lstStyle/>
-          <a:p>
-            <a:pPr marL="12700">
-              <a:lnSpc>
-                <a:spcPct val="100000"/>
-              </a:lnSpc>
-              <a:spcBef>
-                <a:spcPts val="1780"/>
-              </a:spcBef>
-            </a:pPr>
-            <a:r>
-              <a:rPr sz="2750" spc="-50" dirty="0">
-                <a:solidFill>
-                  <a:srgbClr val="08182A"/>
-                </a:solidFill>
-                <a:latin typeface="Calibri"/>
-                <a:cs typeface="Calibri"/>
-              </a:rPr>
-              <a:t>Predicted</a:t>
-            </a:r>
-            <a:r>
-              <a:rPr sz="2750" spc="-35" dirty="0">
-                <a:solidFill>
-                  <a:srgbClr val="08182A"/>
-                </a:solidFill>
-                <a:latin typeface="Calibri"/>
-                <a:cs typeface="Calibri"/>
-              </a:rPr>
-              <a:t> </a:t>
-            </a:r>
-            <a:r>
-              <a:rPr sz="2750" spc="-70" dirty="0">
-                <a:solidFill>
-                  <a:srgbClr val="1C1C1C"/>
-                </a:solidFill>
-                <a:latin typeface="Calibri"/>
-                <a:cs typeface="Calibri"/>
-              </a:rPr>
-              <a:t>Status</a:t>
-            </a:r>
-            <a:r>
-              <a:rPr sz="2750" spc="-110" dirty="0">
-                <a:solidFill>
-                  <a:srgbClr val="1C1C1C"/>
-                </a:solidFill>
-                <a:latin typeface="Calibri"/>
-                <a:cs typeface="Calibri"/>
-              </a:rPr>
-              <a:t> </a:t>
-            </a:r>
-            <a:r>
-              <a:rPr sz="2750" spc="-35" dirty="0">
-                <a:solidFill>
-                  <a:srgbClr val="082138"/>
-                </a:solidFill>
-                <a:latin typeface="Calibri"/>
-                <a:cs typeface="Calibri"/>
-              </a:rPr>
-              <a:t>of</a:t>
-            </a:r>
-            <a:r>
-              <a:rPr sz="2750" spc="-280" dirty="0">
-                <a:solidFill>
-                  <a:srgbClr val="082138"/>
-                </a:solidFill>
-                <a:latin typeface="Calibri"/>
-                <a:cs typeface="Calibri"/>
-              </a:rPr>
-              <a:t> </a:t>
-            </a:r>
-            <a:r>
-              <a:rPr sz="2750" spc="-35" dirty="0">
-                <a:solidFill>
-                  <a:srgbClr val="1D1D1D"/>
-                </a:solidFill>
-                <a:latin typeface="Calibri"/>
-                <a:cs typeface="Calibri"/>
-              </a:rPr>
-              <a:t>Enrolled</a:t>
-            </a:r>
-            <a:r>
-              <a:rPr sz="2750" spc="-95" dirty="0">
-                <a:solidFill>
-                  <a:srgbClr val="1D1D1D"/>
-                </a:solidFill>
-                <a:latin typeface="Calibri"/>
-                <a:cs typeface="Calibri"/>
-              </a:rPr>
-              <a:t> </a:t>
-            </a:r>
-            <a:r>
-              <a:rPr sz="2750" spc="-35" dirty="0">
-                <a:solidFill>
-                  <a:srgbClr val="1A1A1A"/>
-                </a:solidFill>
-                <a:latin typeface="Calibri"/>
-                <a:cs typeface="Calibri"/>
-              </a:rPr>
-              <a:t>Students</a:t>
-            </a:r>
-            <a:endParaRPr sz="2750">
-              <a:latin typeface="Calibri"/>
-              <a:cs typeface="Calibri"/>
-            </a:endParaRPr>
-          </a:p>
-          <a:p>
-            <a:pPr marL="988060">
-              <a:lnSpc>
-                <a:spcPct val="100000"/>
-              </a:lnSpc>
-              <a:spcBef>
-                <a:spcPts val="1350"/>
-              </a:spcBef>
-            </a:pPr>
-            <a:r>
-              <a:rPr sz="2200" spc="-25" dirty="0">
-                <a:latin typeface="Calibri"/>
-                <a:cs typeface="Calibri"/>
-              </a:rPr>
-              <a:t>430</a:t>
-            </a:r>
-            <a:endParaRPr sz="2200">
-              <a:latin typeface="Calibri"/>
-              <a:cs typeface="Calibri"/>
-            </a:endParaRPr>
-          </a:p>
-        </p:txBody>
-      </p:sp>
-      <p:sp>
-        <p:nvSpPr>
-          <p:cNvPr id="9" name="object 9"/>
-          <p:cNvSpPr txBox="1"/>
-          <p:nvPr/>
-        </p:nvSpPr>
-        <p:spPr>
-          <a:xfrm>
-            <a:off x="11469042" y="7082366"/>
-            <a:ext cx="3607435" cy="647700"/>
-          </a:xfrm>
-          <a:prstGeom prst="rect">
-            <a:avLst/>
-          </a:prstGeom>
-        </p:spPr>
-        <p:txBody>
-          <a:bodyPr vert="horz" wrap="square" lIns="0" tIns="16510" rIns="0" bIns="0" rtlCol="0">
-            <a:spAutoFit/>
-          </a:bodyPr>
-          <a:lstStyle/>
-          <a:p>
-            <a:pPr algn="ctr">
-              <a:lnSpc>
-                <a:spcPts val="2430"/>
-              </a:lnSpc>
-              <a:spcBef>
-                <a:spcPts val="130"/>
-              </a:spcBef>
-              <a:tabLst>
-                <a:tab pos="2745105" algn="l"/>
-              </a:tabLst>
-            </a:pPr>
-            <a:r>
-              <a:rPr sz="2050" spc="-10" dirty="0">
-                <a:latin typeface="Calibri"/>
-                <a:cs typeface="Calibri"/>
-              </a:rPr>
-              <a:t>Graduate</a:t>
-            </a:r>
-            <a:r>
-              <a:rPr sz="2050" dirty="0">
-                <a:latin typeface="Calibri"/>
-                <a:cs typeface="Calibri"/>
-              </a:rPr>
-              <a:t>	</a:t>
-            </a:r>
-            <a:r>
-              <a:rPr sz="2050" spc="-40" dirty="0">
-                <a:latin typeface="Calibri"/>
-                <a:cs typeface="Calibri"/>
-              </a:rPr>
-              <a:t>Dropout</a:t>
-            </a:r>
-            <a:endParaRPr sz="2050">
-              <a:latin typeface="Calibri"/>
-              <a:cs typeface="Calibri"/>
-            </a:endParaRPr>
-          </a:p>
-          <a:p>
-            <a:pPr marL="60960" algn="ctr">
-              <a:lnSpc>
-                <a:spcPts val="2430"/>
-              </a:lnSpc>
-            </a:pPr>
-            <a:r>
-              <a:rPr sz="2050" spc="-40" dirty="0">
-                <a:latin typeface="Calibri"/>
-                <a:cs typeface="Calibri"/>
-              </a:rPr>
-              <a:t>Predicted</a:t>
-            </a:r>
-            <a:r>
-              <a:rPr sz="2050" spc="-80" dirty="0">
-                <a:latin typeface="Calibri"/>
-                <a:cs typeface="Calibri"/>
-              </a:rPr>
-              <a:t> </a:t>
-            </a:r>
-            <a:r>
-              <a:rPr sz="2050" spc="-10" dirty="0">
-                <a:latin typeface="Calibri"/>
-                <a:cs typeface="Calibri"/>
-              </a:rPr>
-              <a:t>Status</a:t>
-            </a:r>
-            <a:endParaRPr sz="2050">
-              <a:latin typeface="Calibri"/>
-              <a:cs typeface="Calibri"/>
-            </a:endParaRPr>
-          </a:p>
-        </p:txBody>
-      </p:sp>
-      <p:sp>
-        <p:nvSpPr>
           <p:cNvPr id="10" name="object 10"/>
           <p:cNvSpPr txBox="1"/>
           <p:nvPr/>
@@ -23786,6 +23482,36 @@
           </a:p>
         </p:txBody>
       </p:sp>
+      <p:pic>
+        <p:nvPicPr>
+          <p:cNvPr id="12" name="Picture 11">
+            <a:extLst>
+              <a:ext uri="{FF2B5EF4-FFF2-40B4-BE49-F238E27FC236}">
+                <a16:creationId xmlns:a16="http://schemas.microsoft.com/office/drawing/2014/main" id="{070DD469-17C7-ADBD-ADE0-6DE07043BE93}"/>
+              </a:ext>
+            </a:extLst>
+          </p:cNvPr>
+          <p:cNvPicPr>
+            <a:picLocks noChangeAspect="1"/>
+          </p:cNvPicPr>
+          <p:nvPr/>
+        </p:nvPicPr>
+        <p:blipFill>
+          <a:blip r:embed="rId3"/>
+          <a:stretch>
+            <a:fillRect/>
+          </a:stretch>
+        </p:blipFill>
+        <p:spPr>
+          <a:xfrm>
+            <a:off x="9728200" y="2947232"/>
+            <a:ext cx="6477000" cy="4925873"/>
+          </a:xfrm>
+          <a:prstGeom prst="rect">
+            <a:avLst/>
+          </a:prstGeom>
+        </p:spPr>
+      </p:pic>
     </p:spTree>
   </p:cSld>
   <p:clrMapOvr>
